--- a/Assets/PPT/21조 PPT 발표본.pptx
+++ b/Assets/PPT/21조 PPT 발표본.pptx
@@ -26435,8 +26435,8 @@
         </p:nvSpPr>
         <p:spPr>
           <a:xfrm>
-            <a:off x="817131" y="2916853"/>
-            <a:ext cx="10555717" cy="1269578"/>
+            <a:off x="817131" y="3057606"/>
+            <a:ext cx="10555717" cy="648896"/>
           </a:xfrm>
           <a:prstGeom prst="rect">
             <a:avLst/>
@@ -26457,6 +26457,17 @@
               <a:buChar char="u"/>
             </a:pPr>
             <a:r>
+              <a:rPr lang="ko-KR" altLang="en-US" sz="1600" b="1" dirty="0">
+                <a:solidFill>
+                  <a:srgbClr val="000000"/>
+                </a:solidFill>
+                <a:latin typeface="Arial"/>
+                <a:ea typeface="맑은 고딕"/>
+                <a:cs typeface="Arial"/>
+              </a:rPr>
+              <a:t>씬 </a:t>
+            </a:r>
+            <a:r>
               <a:rPr lang="ko-KR" altLang="en-US" sz="1600" b="1" dirty="0" err="1">
                 <a:solidFill>
                   <a:srgbClr val="000000"/>
@@ -26465,9 +26476,31 @@
                 <a:ea typeface="맑은 고딕"/>
                 <a:cs typeface="Arial"/>
               </a:rPr>
-              <a:t>보스몬스터</a:t>
+              <a:t>전환시</a:t>
             </a:r>
-            <a:endParaRPr lang="ko-KR" altLang="en-US" sz="1600" b="1" i="0" u="none" strike="noStrike" dirty="0" err="1">
+            <a:r>
+              <a:rPr lang="ko-KR" altLang="en-US" sz="1600" b="1" dirty="0">
+                <a:solidFill>
+                  <a:srgbClr val="000000"/>
+                </a:solidFill>
+                <a:latin typeface="Arial"/>
+                <a:ea typeface="맑은 고딕"/>
+                <a:cs typeface="Arial"/>
+              </a:rPr>
+              <a:t>  </a:t>
+            </a:r>
+            <a:r>
+              <a:rPr lang="ko-KR" altLang="en-US" sz="1600" b="1" dirty="0" err="1">
+                <a:solidFill>
+                  <a:srgbClr val="000000"/>
+                </a:solidFill>
+                <a:latin typeface="Arial"/>
+                <a:ea typeface="맑은 고딕"/>
+                <a:cs typeface="Arial"/>
+              </a:rPr>
+              <a:t>NullReferenceException</a:t>
+            </a:r>
+            <a:endParaRPr lang="ko-KR" altLang="en-US" sz="1600" b="1" i="0" u="none" strike="noStrike" dirty="0">
               <a:solidFill>
                 <a:srgbClr val="000000"/>
               </a:solidFill>
@@ -26486,6 +26519,17 @@
               <a:buChar char="§"/>
             </a:pPr>
             <a:r>
+              <a:rPr lang="ko-KR" altLang="en-US" sz="1600" dirty="0" err="1">
+                <a:solidFill>
+                  <a:srgbClr val="000000"/>
+                </a:solidFill>
+                <a:latin typeface="Arial"/>
+                <a:ea typeface="맑은 고딕"/>
+                <a:cs typeface="Arial"/>
+              </a:rPr>
+              <a:t>씬이</a:t>
+            </a:r>
+            <a:r>
               <a:rPr lang="ko-KR" altLang="en-US" sz="1600" dirty="0">
                 <a:solidFill>
                   <a:srgbClr val="000000"/>
@@ -26494,7 +26538,7 @@
                 <a:ea typeface="맑은 고딕"/>
                 <a:cs typeface="Arial"/>
               </a:rPr>
-              <a:t>처음 만든 </a:t>
+              <a:t> 넘어가면서 </a:t>
             </a:r>
             <a:r>
               <a:rPr lang="ko-KR" altLang="en-US" sz="1600" dirty="0" err="1">
@@ -26505,7 +26549,7 @@
                 <a:ea typeface="맑은 고딕"/>
                 <a:cs typeface="Arial"/>
               </a:rPr>
-              <a:t>보스몬스터가</a:t>
+              <a:t>Awake</a:t>
             </a:r>
             <a:r>
               <a:rPr lang="ko-KR" altLang="en-US" sz="1600" dirty="0">
@@ -26516,65 +26560,61 @@
                 <a:ea typeface="맑은 고딕"/>
                 <a:cs typeface="Arial"/>
               </a:rPr>
-              <a:t> 게임의 방향성과 많이 어긋나서 급하게 몬스터의 움직임을 추가하였다.</a:t>
-            </a:r>
-          </a:p>
-          <a:p>
-            <a:pPr marL="742950" lvl="1" indent="-285750">
-              <a:spcBef>
-                <a:spcPts val="500"/>
-              </a:spcBef>
-              <a:buFont typeface="Wingdings" panose="05000000000000000000" pitchFamily="2" charset="2"/>
-              <a:buChar char="§"/>
-            </a:pPr>
-            <a:r>
-              <a:rPr lang="ko-KR" altLang="en-US" sz="1600" dirty="0">
-                <a:ea typeface="맑은 고딕"/>
-              </a:rPr>
-              <a:t>몬스터가 총알을 너무 많이 발사하면서 </a:t>
+              <a:t>, </a:t>
             </a:r>
             <a:r>
               <a:rPr lang="ko-KR" altLang="en-US" sz="1600" dirty="0" err="1">
+                <a:solidFill>
+                  <a:srgbClr val="000000"/>
+                </a:solidFill>
+                <a:latin typeface="Arial"/>
                 <a:ea typeface="맑은 고딕"/>
+                <a:cs typeface="Arial"/>
               </a:rPr>
-              <a:t>렉걸리는</a:t>
+              <a:t>Start</a:t>
             </a:r>
             <a:r>
               <a:rPr lang="ko-KR" altLang="en-US" sz="1600" dirty="0">
+                <a:solidFill>
+                  <a:srgbClr val="000000"/>
+                </a:solidFill>
+                <a:latin typeface="Arial"/>
                 <a:ea typeface="맑은 고딕"/>
+                <a:cs typeface="Arial"/>
               </a:rPr>
-              <a:t> 상황이 자주 나타났다.</a:t>
-            </a:r>
-            <a:endParaRPr lang="en-US" altLang="ko-KR" sz="1600" dirty="0">
-              <a:ea typeface="맑은 고딕"/>
-            </a:endParaRPr>
-          </a:p>
-          <a:p>
-            <a:pPr marL="742950" lvl="1" indent="-285750">
-              <a:spcBef>
-                <a:spcPts val="500"/>
-              </a:spcBef>
-              <a:buFont typeface="Wingdings" panose="05000000000000000000" pitchFamily="2" charset="2"/>
-              <a:buChar char="§"/>
-            </a:pPr>
-            <a:r>
-              <a:rPr lang="ko-KR" altLang="en-US" sz="1600" dirty="0">
-                <a:ea typeface="맑은 고딕"/>
-              </a:rPr>
-              <a:t>보스 씬 을 로드 </a:t>
+              <a:t>, </a:t>
             </a:r>
             <a:r>
               <a:rPr lang="ko-KR" altLang="en-US" sz="1600" dirty="0" err="1">
+                <a:solidFill>
+                  <a:srgbClr val="000000"/>
+                </a:solidFill>
+                <a:latin typeface="Arial"/>
                 <a:ea typeface="맑은 고딕"/>
+                <a:cs typeface="Arial"/>
               </a:rPr>
-              <a:t>할때</a:t>
+              <a:t>OnEnable단계에서</a:t>
             </a:r>
             <a:r>
               <a:rPr lang="ko-KR" altLang="en-US" sz="1600" dirty="0">
+                <a:solidFill>
+                  <a:srgbClr val="000000"/>
+                </a:solidFill>
+                <a:latin typeface="Arial"/>
                 <a:ea typeface="맑은 고딕"/>
+                <a:cs typeface="Arial"/>
               </a:rPr>
-              <a:t> 레벨이 초기화되는 문제도 발생했다 </a:t>
+              <a:t> 해당 오류가 자주 발생하였다. </a:t>
             </a:r>
+            <a:endParaRPr lang="ko-KR" altLang="en-US" sz="1600" b="0" i="0" u="none" strike="noStrike" dirty="0">
+              <a:solidFill>
+                <a:srgbClr val="000000"/>
+              </a:solidFill>
+              <a:effectLst/>
+              <a:latin typeface="Arial"/>
+              <a:ea typeface="맑은 고딕"/>
+              <a:cs typeface="Arial"/>
+            </a:endParaRPr>
           </a:p>
         </p:txBody>
       </p:sp>
@@ -26592,7 +26632,7 @@
         </p:nvSpPr>
         <p:spPr>
           <a:xfrm>
-            <a:off x="830175" y="4168896"/>
+            <a:off x="830175" y="3784655"/>
             <a:ext cx="10555717" cy="2787943"/>
           </a:xfrm>
           <a:prstGeom prst="rect">
